--- a/docs/content/quarto/leaf_report_template.pptx
+++ b/docs/content/quarto/leaf_report_template.pptx
@@ -3346,7 +3346,7 @@
             </a:pPr>
             <a:r>
               <a:rPr/>
-              <a:t>2026-07-05</a:t>
+              <a:t>2026-08-27</a:t>
             </a:r>
           </a:p>
         </p:txBody>
@@ -3969,27 +3969,17 @@
             </a:pPr>
             <a:r>
               <a:rPr/>
-              <a:t>On average, shady-side leaves weighed </a:t>
-            </a:r>
-            <a:r>
-              <a:rPr b="1"/>
-              <a:t>7.8 g</a:t>
+              <a:t>Read the mean weight for each side straight from the </a:t>
+            </a:r>
+            <a:r>
+              <a:rPr>
+                <a:latin typeface="Courier"/>
+              </a:rPr>
+              <a:t>mean_wt</a:t>
             </a:r>
             <a:r>
               <a:rPr/>
-              <a:t> and sunny-side leaves weighed </a:t>
-            </a:r>
-            <a:r>
-              <a:rPr b="1"/>
-              <a:t>3.8 g</a:t>
-            </a:r>
-            <a:r>
-              <a:rPr/>
-              <a:t>. </a:t>
-            </a:r>
-            <a:r>
-              <a:rPr i="1"/>
-              <a:t>(Notice: those numbers are inserted with inline code — change the data and the sentence updates itself.)</a:t>
+              <a:t> column of Table 1. Because the table is built from the data every time the document renders, the numbers update themselves whenever the data file changes — nothing is typed by hand.</a:t>
             </a:r>
           </a:p>
         </p:txBody>
